--- a/examples/pm3_chapter_marker_numbering/chapter_marker_numbering_guide.pptx
+++ b/examples/pm3_chapter_marker_numbering/chapter_marker_numbering_guide.pptx
@@ -590,81 +590,61 @@
               <a:t>NOTE_CONTENT_FORMAT: 1.0</a:t>
             </a:r>
           </a:p>
-          <a:p>
-            <a:endParaRPr/>
-          </a:p>
-          <a:p>
-            <a:r>
-              <a:rPr lang="en-US" altLang="ja-JP"/>
+          <a:p/>
+          <a:p>
+            <a:r>
               <a:t>===BLOCK===</a:t>
             </a:r>
           </a:p>
           <a:p>
             <a:r>
-              <a:rPr lang="en-US" altLang="ja-JP"/>
               <a:t>{{BLOCK:IMAGE}}</a:t>
             </a:r>
           </a:p>
-          <a:p>
-            <a:endParaRPr lang="en-US" altLang="ja-JP"/>
-          </a:p>
-          <a:p>
-            <a:r>
-              <a:rPr lang="en-US" altLang="ja-JP"/>
+          <a:p/>
+          <a:p>
+            <a:r>
               <a:t>export-image-mode: slide_with_rectpct</a:t>
             </a:r>
           </a:p>
           <a:p>
             <a:r>
-              <a:rPr lang="en-US" altLang="ja-JP"/>
               <a:t>export-image-target: exportrange</a:t>
             </a:r>
           </a:p>
           <a:p>
             <a:r>
-              <a:rPr lang="en-US" altLang="ja-JP"/>
               <a:t>export-image: extracted/figures/&lt;__BASEFILENAME__&gt;_slide&lt;__SLIDENUM__&gt;_fig.png</a:t>
             </a:r>
           </a:p>
-          <a:p>
-            <a:endParaRPr lang="en-US" altLang="ja-JP"/>
-          </a:p>
-          <a:p>
-            <a:r>
-              <a:rPr lang="en-US" altLang="ja-JP"/>
+          <a:p/>
+          <a:p>
+            <a:r>
               <a:t>===BLOCK===</a:t>
             </a:r>
           </a:p>
           <a:p>
             <a:r>
-              <a:rPr lang="en-US" altLang="ja-JP"/>
               <a:t>{{BLOCK:IMAGE}}</a:t>
             </a:r>
           </a:p>
-          <a:p>
-            <a:endParaRPr lang="en-US" altLang="ja-JP"/>
-          </a:p>
-          <a:p>
-            <a:r>
-              <a:rPr lang="en-US" altLang="ja-JP"/>
+          <a:p/>
+          <a:p>
+            <a:r>
               <a:t>export-image-mode: slide_with_rectpct</a:t>
             </a:r>
           </a:p>
           <a:p>
             <a:r>
-              <a:rPr lang="en-US" altLang="ja-JP"/>
               <a:t>export-image-target: keyvisual</a:t>
             </a:r>
           </a:p>
           <a:p>
             <a:r>
-              <a:rPr lang="en-US" altLang="ja-JP"/>
               <a:t>export-image: extracted/figures/&lt;__BASEFILENAME__&gt;_keyvisual.png</a:t>
             </a:r>
           </a:p>
-          <a:p>
-            <a:endParaRPr lang="en-US" altLang="ja-JP"/>
-          </a:p>
+          <a:p/>
           <a:p>
             <a:r>
               <a:t>===BLOCK===</a:t>
@@ -675,151 +655,72 @@
               <a:t>{{BLOCK:MD:LONG}}</a:t>
             </a:r>
           </a:p>
-          <a:p>
-            <a:endParaRPr/>
-          </a:p>
-          <a:p>
-            <a:pPr marL="0" marR="0" lvl="0" indent="0" algn="l" defTabSz="914400" rtl="0" eaLnBrk="1" fontAlgn="auto" latinLnBrk="0" hangingPunct="1">
-              <a:lnSpc>
-                <a:spcPct val="100000"/>
-              </a:lnSpc>
-              <a:spcBef>
-                <a:spcPts val="0"/>
-              </a:spcBef>
-              <a:spcAft>
-                <a:spcPts val="0"/>
-              </a:spcAft>
-              <a:buClrTx/>
-              <a:buSzTx/>
-              <a:buFontTx/>
-              <a:buNone/>
-              <a:tabLst/>
-              <a:defRPr/>
-            </a:pPr>
-            <a:r>
-              <a:rPr lang="en-US" altLang="ja-JP"/>
+          <a:p/>
+          <a:p>
+            <a:r>
               <a:t>export-note: extracted/&lt;__BASEFILENAME__&gt;_slide&lt;__SLIDENUM__&gt;_md.md</a:t>
             </a:r>
           </a:p>
           <a:p>
             <a:r>
-              <a:rPr lang="en-US" altLang="ja-JP"/>
               <a:t>{{#id:section:&lt;__BASEFILENAME__&gt;:slide&lt;__SLIDENUM__&gt;}}</a:t>
             </a:r>
           </a:p>
           <a:p>
             <a:r>
-              <a:rPr lang="en-US" altLang="ja-JP"/>
               <a:t>## &lt;__TITLE__&gt;</a:t>
             </a:r>
           </a:p>
-          <a:p>
-            <a:endParaRPr/>
-          </a:p>
+          <a:p/>
           <a:p>
             <a:r>
               <a:t>chapt_section ナンバリングにおいて、operation: chapter ではなく、スライド上の特殊文字列でカウントを行う方法があります。</a:t>
             </a:r>
           </a:p>
-          <a:p>
-            <a:endParaRPr/>
-          </a:p>
+          <a:p/>
           <a:p>
             <a:r>
               <a:t>スライド上のどこかにマーカー文字列 #CHAPT# を描いておくと、そのスライドを Chapter cover （章の表紙、章とびら）として扱うものです。</a:t>
             </a:r>
           </a:p>
-          <a:p>
-            <a:endParaRPr/>
-          </a:p>
+          <a:p/>
           <a:p>
             <a:r>
               <a:t>一般のスライドは "1.2) ・・・" のように　章・節番号　でナンバリングしますが、Chapter cover ページは章番号(Chapter番号)だけでナンバリングします。</a:t>
             </a:r>
           </a:p>
-          <a:p>
-            <a:endParaRPr/>
-          </a:p>
+          <a:p/>
           <a:p>
             <a:r>
               <a:t>処理のイメージは下記の通りです。</a:t>
             </a:r>
           </a:p>
-          <a:p>
-            <a:endParaRPr/>
-          </a:p>
-          <a:p>
-            <a:r>
-              <a:t>```{=latex}</a:t>
-            </a:r>
-          </a:p>
-          <a:p>
-            <a:r>
-              <a:t>\begin{center}</a:t>
-            </a:r>
-          </a:p>
-          <a:p>
-            <a:r>
-              <a:t>```</a:t>
-            </a:r>
-          </a:p>
-          <a:p>
-            <a:endParaRPr/>
-          </a:p>
-          <a:p>
-            <a:r>
-              <a:rPr lang="en-US" altLang="ja-JP"/>
+          <a:p/>
+          <a:p>
+            <a:r>
+              <a:t>::: {.center}</a:t>
+            </a:r>
+          </a:p>
+          <a:p/>
+          <a:p>
+            <a:r>
               <a:t>![](figures/&lt;__BASEFILENAME__&gt;_slide&lt;__SLIDENUM__&gt;_fig.png){ width=95% }</a:t>
             </a:r>
           </a:p>
-          <a:p>
-            <a:endParaRPr lang="en-US" altLang="ja-JP"/>
-          </a:p>
-          <a:p>
-            <a:pPr marL="0" marR="0" lvl="0" indent="0" algn="l" defTabSz="914400" rtl="0" eaLnBrk="1" fontAlgn="auto" latinLnBrk="0" hangingPunct="1">
-              <a:lnSpc>
-                <a:spcPct val="100000"/>
-              </a:lnSpc>
-              <a:spcBef>
-                <a:spcPts val="0"/>
-              </a:spcBef>
-              <a:spcAft>
-                <a:spcPts val="0"/>
-              </a:spcAft>
-              <a:buClrTx/>
-              <a:buSzTx/>
-              <a:buFontTx/>
-              <a:buNone/>
-              <a:tabLst/>
-              <a:defRPr/>
-            </a:pPr>
-            <a:r>
-              <a:rPr lang="en-US" altLang="ja-JP"/>
+          <a:p/>
+          <a:p>
+            <a:r>
               <a:t>![](figures/&lt;__BASEFILENAME__&gt;_keyvisual.png){ width=85% }</a:t>
             </a:r>
           </a:p>
-          <a:p>
-            <a:endParaRPr/>
-          </a:p>
-          <a:p>
-            <a:r>
-              <a:t>```{=latex}</a:t>
-            </a:r>
-          </a:p>
-          <a:p>
-            <a:r>
-              <a:t>\end{center}</a:t>
-            </a:r>
-          </a:p>
-          <a:p>
-            <a:r>
-              <a:t>```</a:t>
-            </a:r>
-            <a:endParaRPr lang="en-US"/>
-          </a:p>
-          <a:p>
-            <a:endParaRPr/>
-          </a:p>
+          <a:p/>
+          <a:p>
+            <a:r>
+              <a:t>:::</a:t>
+            </a:r>
+          </a:p>
+          <a:p/>
+          <a:p/>
         </p:txBody>
       </p:sp>
       <p:sp>
@@ -924,9 +825,7 @@
               <a:t>NOTE_CONTENT_FORMAT: 1.0</a:t>
             </a:r>
           </a:p>
-          <a:p>
-            <a:endParaRPr/>
-          </a:p>
+          <a:p/>
           <a:p>
             <a:r>
               <a:t>===BLOCK===</a:t>
@@ -937,9 +836,7 @@
               <a:t>{{BLOCK:IMAGE}}</a:t>
             </a:r>
           </a:p>
-          <a:p>
-            <a:endParaRPr/>
-          </a:p>
+          <a:p/>
           <a:p>
             <a:r>
               <a:t>export-image-mode: slide_with_rectpct</a:t>
@@ -952,13 +849,10 @@
           </a:p>
           <a:p>
             <a:r>
-              <a:rPr lang="en-US" altLang="ja-JP"/>
               <a:t>export-image: extracted/figures/&lt;__BASEFILENAME__&gt;_slide&lt;__SLIDENUM__&gt;_fig.png</a:t>
             </a:r>
           </a:p>
-          <a:p>
-            <a:endParaRPr/>
-          </a:p>
+          <a:p/>
           <a:p>
             <a:r>
               <a:t>===BLOCK===</a:t>
@@ -969,100 +863,60 @@
               <a:t>{{BLOCK:MD:LONG}}</a:t>
             </a:r>
           </a:p>
-          <a:p>
-            <a:endParaRPr/>
-          </a:p>
-          <a:p>
-            <a:r>
-              <a:rPr lang="en-US" altLang="ja-JP"/>
+          <a:p/>
+          <a:p>
+            <a:r>
               <a:t>export-note: extracted/&lt;__BASEFILENAME__&gt;_slide&lt;__SLIDENUM__&gt;_md.md</a:t>
             </a:r>
           </a:p>
           <a:p>
             <a:r>
-              <a:rPr lang="en-US" altLang="ja-JP"/>
               <a:t>{{#id:section:&lt;__BASEFILENAME__&gt;:slide&lt;__SLIDENUM__&gt;}}</a:t>
             </a:r>
           </a:p>
           <a:p>
             <a:r>
-              <a:rPr lang="en-US" altLang="ja-JP"/>
               <a:t>## &lt;__TITLE__&gt;</a:t>
             </a:r>
           </a:p>
-          <a:p>
-            <a:endParaRPr/>
-          </a:p>
+          <a:p/>
           <a:p>
             <a:r>
               <a:t>マーカー式ナンバリングで使うマーカー文字列 #CHAPT# はスライド上のどこに置いてもかまいません。マージ処理の過程で消去されるので、目立つ大きさや色でもかまいません。ただし、画像ではダメで、テキストシェイプを使ってください。</a:t>
             </a:r>
           </a:p>
-          <a:p>
-            <a:endParaRPr/>
-          </a:p>
+          <a:p/>
           <a:p>
             <a:r>
               <a:t>#CHAPT# マーカーのあるスライドはそのChapterの先頭ですから、Chapter 全体の内容予告や概要説明を行うChapter cover を入れたいときに使うとよいでしょう。</a:t>
             </a:r>
           </a:p>
-          <a:p>
-            <a:endParaRPr/>
-          </a:p>
+          <a:p/>
           <a:p>
             <a:r>
               <a:t>処理のイメージは下記の通りです。</a:t>
             </a:r>
           </a:p>
-          <a:p>
-            <a:endParaRPr/>
-          </a:p>
-          <a:p>
-            <a:r>
-              <a:t>```{=latex}</a:t>
-            </a:r>
-          </a:p>
-          <a:p>
-            <a:r>
-              <a:t>\begin{center}</a:t>
-            </a:r>
-          </a:p>
-          <a:p>
-            <a:r>
-              <a:t>```</a:t>
-            </a:r>
-          </a:p>
-          <a:p>
-            <a:endParaRPr/>
-          </a:p>
-          <a:p>
-            <a:r>
-              <a:rPr lang="en-US" altLang="ja-JP"/>
+          <a:p/>
+          <a:p>
+            <a:r>
+              <a:t>::: {.center}</a:t>
+            </a:r>
+          </a:p>
+          <a:p/>
+          <a:p>
+            <a:r>
               <a:t>![](figures/&lt;__BASEFILENAME__&gt;_slide&lt;__SLIDENUM__&gt;_fig.png){ width=95% }</a:t>
             </a:r>
           </a:p>
-          <a:p>
-            <a:endParaRPr/>
-          </a:p>
-          <a:p>
-            <a:r>
-              <a:t>```{=latex}</a:t>
-            </a:r>
-          </a:p>
-          <a:p>
-            <a:r>
-              <a:t>\end{center}</a:t>
-            </a:r>
-          </a:p>
-          <a:p>
-            <a:r>
-              <a:t>```</a:t>
-            </a:r>
-            <a:endParaRPr lang="en-US"/>
-          </a:p>
-          <a:p>
-            <a:endParaRPr/>
-          </a:p>
+          <a:p/>
+          <a:p>
+            <a:r>
+              <a:t>:::</a:t>
+            </a:r>
+          </a:p>
+          <a:p/>
+          <a:p/>
         </p:txBody>
       </p:sp>
       <p:sp>
@@ -1173,9 +1027,7 @@
               <a:t>NOTE_CONTENT_FORMAT: 1.0</a:t>
             </a:r>
           </a:p>
-          <a:p>
-            <a:endParaRPr/>
-          </a:p>
+          <a:p/>
           <a:p>
             <a:r>
               <a:t>===BLOCK===</a:t>
@@ -1186,9 +1038,7 @@
               <a:t>{{BLOCK:IMAGE}}</a:t>
             </a:r>
           </a:p>
-          <a:p>
-            <a:endParaRPr/>
-          </a:p>
+          <a:p/>
           <a:p>
             <a:r>
               <a:t>export-image-mode: slide_with_rectpct</a:t>
@@ -1201,13 +1051,10 @@
           </a:p>
           <a:p>
             <a:r>
-              <a:rPr lang="en-US"/>
               <a:t>export-image: extracted/figures/&lt;__BASEFILENAME__&gt;_slide&lt;__SLIDENUM__&gt;_fig.png</a:t>
             </a:r>
           </a:p>
-          <a:p>
-            <a:endParaRPr/>
-          </a:p>
+          <a:p/>
           <a:p>
             <a:r>
               <a:t>===BLOCK===</a:t>
@@ -1218,84 +1065,48 @@
               <a:t>{{BLOCK:MD:LONG}}</a:t>
             </a:r>
           </a:p>
-          <a:p>
-            <a:endParaRPr/>
-          </a:p>
-          <a:p>
-            <a:r>
-              <a:rPr lang="en-US" altLang="ja-JP"/>
+          <a:p/>
+          <a:p>
+            <a:r>
               <a:t>export-note: extracted/&lt;__BASEFILENAME__&gt;_slide&lt;__SLIDENUM__&gt;_md.md</a:t>
             </a:r>
           </a:p>
           <a:p>
             <a:r>
-              <a:rPr lang="en-US"/>
               <a:t>{{#id:section:&lt;__BASEFILENAME__&gt;:slide&lt;__SLIDENUM__&gt;}}</a:t>
             </a:r>
           </a:p>
           <a:p>
             <a:r>
-              <a:rPr lang="en-US"/>
               <a:t>## &lt;__TITLE__&gt;</a:t>
             </a:r>
           </a:p>
-          <a:p>
-            <a:endParaRPr/>
-          </a:p>
+          <a:p/>
           <a:p>
             <a:r>
               <a:t>ひとつのファイルの中に複数の #CHAPT# を入れてもかまいません。1ファイル中に複数の Chapter を含むような大きな文書部品もこの方法でナンバリングできます。</a:t>
             </a:r>
           </a:p>
-          <a:p>
-            <a:endParaRPr/>
-          </a:p>
-          <a:p>
-            <a:r>
-              <a:t>```{=latex}</a:t>
-            </a:r>
-          </a:p>
-          <a:p>
-            <a:r>
-              <a:t>\begin{center}</a:t>
-            </a:r>
-          </a:p>
-          <a:p>
-            <a:r>
-              <a:t>```</a:t>
-            </a:r>
-          </a:p>
-          <a:p>
-            <a:endParaRPr/>
-          </a:p>
-          <a:p>
-            <a:r>
-              <a:rPr lang="en-US"/>
+          <a:p/>
+          <a:p>
+            <a:r>
+              <a:t>::: {.center}</a:t>
+            </a:r>
+          </a:p>
+          <a:p/>
+          <a:p>
+            <a:r>
               <a:t>![](figures/&lt;__BASEFILENAME__&gt;_slide&lt;__SLIDENUM__&gt;_fig.png){ width=95% }</a:t>
             </a:r>
           </a:p>
-          <a:p>
-            <a:endParaRPr/>
-          </a:p>
-          <a:p>
-            <a:r>
-              <a:t>```{=latex}</a:t>
-            </a:r>
-          </a:p>
-          <a:p>
-            <a:r>
-              <a:t>\end{center}</a:t>
-            </a:r>
-          </a:p>
-          <a:p>
-            <a:r>
-              <a:t>```</a:t>
-            </a:r>
-            <a:endParaRPr lang="en-US"/>
-          </a:p>
-          <a:p>
-            <a:endParaRPr/>
-          </a:p>
+          <a:p/>
+          <a:p>
+            <a:r>
+              <a:t>:::</a:t>
+            </a:r>
+          </a:p>
+          <a:p/>
+          <a:p/>
         </p:txBody>
       </p:sp>
       <p:sp>
@@ -1406,9 +1217,7 @@
               <a:t>NOTE_CONTENT_FORMAT: 1.0</a:t>
             </a:r>
           </a:p>
-          <a:p>
-            <a:endParaRPr/>
-          </a:p>
+          <a:p/>
           <a:p>
             <a:r>
               <a:t>===BLOCK===</a:t>
@@ -1419,9 +1228,7 @@
               <a:t>{{BLOCK:IMAGE}}</a:t>
             </a:r>
           </a:p>
-          <a:p>
-            <a:endParaRPr/>
-          </a:p>
+          <a:p/>
           <a:p>
             <a:r>
               <a:t>export-image-mode: slide_with_rectpct</a:t>
@@ -1434,13 +1241,10 @@
           </a:p>
           <a:p>
             <a:r>
-              <a:rPr lang="en-US"/>
               <a:t>export-image: extracted/figures/&lt;__BASEFILENAME__&gt;_slide&lt;__SLIDENUM__&gt;_fig.png</a:t>
             </a:r>
           </a:p>
-          <a:p>
-            <a:endParaRPr/>
-          </a:p>
+          <a:p/>
           <a:p>
             <a:r>
               <a:t>===BLOCK===</a:t>
@@ -1451,30 +1255,23 @@
               <a:t>{{BLOCK:MD:LONG}}</a:t>
             </a:r>
           </a:p>
-          <a:p>
-            <a:endParaRPr/>
-          </a:p>
-          <a:p>
-            <a:r>
-              <a:rPr lang="en-US" altLang="ja-JP"/>
+          <a:p/>
+          <a:p>
+            <a:r>
               <a:t>export-note: extracted/&lt;__BASEFILENAME__&gt;_slide&lt;__SLIDENUM__&gt;_md.md</a:t>
             </a:r>
           </a:p>
           <a:p>
             <a:r>
-              <a:rPr lang="en-US"/>
               <a:t>{{#id:section:&lt;__BASEFILENAME__&gt;:slide&lt;__SLIDENUM__&gt;}}</a:t>
             </a:r>
           </a:p>
           <a:p>
             <a:r>
-              <a:rPr lang="en-US"/>
               <a:t>## &lt;__TITLE__&gt;</a:t>
             </a:r>
           </a:p>
-          <a:p>
-            <a:endParaRPr/>
-          </a:p>
+          <a:p/>
           <a:p>
             <a:r>
               <a:t>#SECTION# マーカーは節番号をリセットします。</a:t>
@@ -1490,58 +1287,27 @@
               <a:t>（ただしその場合は operation: chapter や section で章・節番号をセットするほうが扱いやすいと思いますが）</a:t>
             </a:r>
           </a:p>
-          <a:p>
-            <a:endParaRPr/>
-          </a:p>
-          <a:p>
-            <a:endParaRPr/>
-          </a:p>
-          <a:p>
-            <a:r>
-              <a:t>```{=latex}</a:t>
-            </a:r>
-          </a:p>
-          <a:p>
-            <a:r>
-              <a:t>\begin{center}</a:t>
-            </a:r>
-          </a:p>
-          <a:p>
-            <a:r>
-              <a:t>```</a:t>
-            </a:r>
-          </a:p>
-          <a:p>
-            <a:endParaRPr/>
-          </a:p>
-          <a:p>
-            <a:r>
-              <a:rPr lang="en-US"/>
+          <a:p/>
+          <a:p/>
+          <a:p>
+            <a:r>
+              <a:t>::: {.center}</a:t>
+            </a:r>
+          </a:p>
+          <a:p/>
+          <a:p>
+            <a:r>
               <a:t>![](figures/&lt;__BASEFILENAME__&gt;_slide&lt;__SLIDENUM__&gt;_fig.png){ width=95% }</a:t>
             </a:r>
           </a:p>
-          <a:p>
-            <a:endParaRPr/>
-          </a:p>
-          <a:p>
-            <a:r>
-              <a:t>```{=latex}</a:t>
-            </a:r>
-          </a:p>
-          <a:p>
-            <a:r>
-              <a:t>\end{center}</a:t>
-            </a:r>
-          </a:p>
-          <a:p>
-            <a:r>
-              <a:t>```</a:t>
-            </a:r>
-            <a:endParaRPr lang="en-US"/>
-          </a:p>
-          <a:p>
-            <a:endParaRPr/>
-          </a:p>
+          <a:p/>
+          <a:p>
+            <a:r>
+              <a:t>:::</a:t>
+            </a:r>
+          </a:p>
+          <a:p/>
+          <a:p/>
         </p:txBody>
       </p:sp>
       <p:sp>
@@ -1652,9 +1418,7 @@
               <a:t>NOTE_CONTENT_FORMAT: 1.0</a:t>
             </a:r>
           </a:p>
-          <a:p>
-            <a:endParaRPr/>
-          </a:p>
+          <a:p/>
           <a:p>
             <a:r>
               <a:t>===BLOCK===</a:t>
@@ -1665,9 +1429,7 @@
               <a:t>{{BLOCK:IMAGE}}</a:t>
             </a:r>
           </a:p>
-          <a:p>
-            <a:endParaRPr/>
-          </a:p>
+          <a:p/>
           <a:p>
             <a:r>
               <a:t>export-image-mode: slide_with_rectpct</a:t>
@@ -1680,13 +1442,10 @@
           </a:p>
           <a:p>
             <a:r>
-              <a:rPr lang="en-US"/>
               <a:t>export-image: extracted/figures/&lt;__BASEFILENAME__&gt;_slide&lt;__SLIDENUM__&gt;_fig.png</a:t>
             </a:r>
           </a:p>
-          <a:p>
-            <a:endParaRPr/>
-          </a:p>
+          <a:p/>
           <a:p>
             <a:r>
               <a:t>===BLOCK===</a:t>
@@ -1697,111 +1456,67 @@
               <a:t>{{BLOCK:MD:LONG}}</a:t>
             </a:r>
           </a:p>
-          <a:p>
-            <a:endParaRPr/>
-          </a:p>
-          <a:p>
-            <a:r>
-              <a:rPr lang="en-US" altLang="ja-JP"/>
+          <a:p/>
+          <a:p>
+            <a:r>
               <a:t>export-note: extracted/&lt;__BASEFILENAME__&gt;_slide&lt;__SLIDENUM__&gt;_md.md</a:t>
             </a:r>
           </a:p>
           <a:p>
             <a:r>
-              <a:rPr lang="en-US"/>
               <a:t>{{#id:section:&lt;__BASEFILENAME__&gt;:slide&lt;__SLIDENUM__&gt;}}</a:t>
             </a:r>
           </a:p>
           <a:p>
             <a:r>
-              <a:rPr lang="en-US"/>
               <a:t>## &lt;__TITLE__&gt;</a:t>
             </a:r>
           </a:p>
-          <a:p>
-            <a:endParaRPr/>
-          </a:p>
+          <a:p/>
           <a:p>
             <a:r>
               <a:t>マーカー方式で章・節ナンバリングをする結合指示書のサンプルです。</a:t>
             </a:r>
           </a:p>
-          <a:p>
-            <a:endParaRPr/>
-          </a:p>
+          <a:p/>
           <a:p>
             <a:r>
               <a:t>pptxnumbering: chapt_section は変わりませんが、ナンバリングそのものはマーカーで行うため、procedureには chapter も section も現れません。</a:t>
             </a:r>
           </a:p>
-          <a:p>
-            <a:endParaRPr/>
-          </a:p>
+          <a:p/>
           <a:p>
             <a:r>
               <a:t>なお、２つの結合ファイルのうち１つ目の chapter_marker_numbering_guide.pptx では章・節番号制御をすべて抑制しているので章・節番号がつきません。</a:t>
             </a:r>
           </a:p>
-          <a:p>
-            <a:endParaRPr/>
-          </a:p>
+          <a:p/>
           <a:p>
             <a:r>
               <a:t>#CHAPT#, #SECTION# マーカーによる制御の実サンプルは、２つめの結合ファイルである chapter_marker_numbering_sample.pptx に該当する部分が結合後pptxの中でどうなっているかをご覧ください。</a:t>
             </a:r>
           </a:p>
-          <a:p>
-            <a:endParaRPr/>
-          </a:p>
-          <a:p>
-            <a:endParaRPr/>
-          </a:p>
-          <a:p>
-            <a:r>
-              <a:t>```{=latex}</a:t>
-            </a:r>
-          </a:p>
-          <a:p>
-            <a:r>
-              <a:t>\begin{center}</a:t>
-            </a:r>
-          </a:p>
-          <a:p>
-            <a:r>
-              <a:t>```</a:t>
-            </a:r>
-          </a:p>
-          <a:p>
-            <a:endParaRPr/>
-          </a:p>
-          <a:p>
-            <a:r>
-              <a:rPr lang="en-US"/>
+          <a:p/>
+          <a:p/>
+          <a:p>
+            <a:r>
+              <a:t>::: {.center}</a:t>
+            </a:r>
+          </a:p>
+          <a:p/>
+          <a:p>
+            <a:r>
               <a:t>![](figures/&lt;__BASEFILENAME__&gt;_slide&lt;__SLIDENUM__&gt;_fig.png){ width=95% }</a:t>
             </a:r>
           </a:p>
-          <a:p>
-            <a:endParaRPr/>
-          </a:p>
-          <a:p>
-            <a:r>
-              <a:t>```{=latex}</a:t>
-            </a:r>
-          </a:p>
-          <a:p>
-            <a:r>
-              <a:t>\end{center}</a:t>
-            </a:r>
-          </a:p>
-          <a:p>
-            <a:r>
-              <a:t>```</a:t>
-            </a:r>
-            <a:endParaRPr lang="en-US"/>
-          </a:p>
-          <a:p>
-            <a:endParaRPr/>
-          </a:p>
+          <a:p/>
+          <a:p>
+            <a:r>
+              <a:t>:::</a:t>
+            </a:r>
+          </a:p>
+          <a:p/>
+          <a:p/>
         </p:txBody>
       </p:sp>
       <p:sp>
@@ -1912,9 +1627,7 @@
               <a:t>NOTE_CONTENT_FORMAT: 1.0</a:t>
             </a:r>
           </a:p>
-          <a:p>
-            <a:endParaRPr/>
-          </a:p>
+          <a:p/>
           <a:p>
             <a:r>
               <a:t>===BLOCK===</a:t>
@@ -1925,9 +1638,7 @@
               <a:t>{{BLOCK:IMAGE}}</a:t>
             </a:r>
           </a:p>
-          <a:p>
-            <a:endParaRPr/>
-          </a:p>
+          <a:p/>
           <a:p>
             <a:r>
               <a:t>export-image-mode: slide_with_rectpct</a:t>
@@ -1940,13 +1651,10 @@
           </a:p>
           <a:p>
             <a:r>
-              <a:rPr lang="en-US"/>
               <a:t>export-image: extracted/figures/&lt;__BASEFILENAME__&gt;_slide&lt;__SLIDENUM__&gt;_fig.png</a:t>
             </a:r>
           </a:p>
-          <a:p>
-            <a:endParaRPr/>
-          </a:p>
+          <a:p/>
           <a:p>
             <a:r>
               <a:t>===BLOCK===</a:t>
@@ -1957,54 +1665,41 @@
               <a:t>{{BLOCK:MD:LONG}}</a:t>
             </a:r>
           </a:p>
-          <a:p>
-            <a:endParaRPr/>
-          </a:p>
-          <a:p>
-            <a:r>
-              <a:rPr lang="en-US" altLang="ja-JP"/>
+          <a:p/>
+          <a:p>
+            <a:r>
               <a:t>export-note: extracted/&lt;__BASEFILENAME__&gt;_slide&lt;__SLIDENUM__&gt;_md.md</a:t>
             </a:r>
           </a:p>
           <a:p>
             <a:r>
-              <a:rPr lang="en-US"/>
               <a:t>{{#id:section:&lt;__BASEFILENAME__&gt;:slide&lt;__SLIDENUM__&gt;}}</a:t>
             </a:r>
           </a:p>
           <a:p>
             <a:r>
-              <a:rPr lang="en-US"/>
               <a:t>## &lt;__TITLE__&gt;</a:t>
             </a:r>
           </a:p>
-          <a:p>
-            <a:endParaRPr/>
-          </a:p>
+          <a:p/>
           <a:p>
             <a:r>
               <a:t>他にもいくつかのマーカーがあります。</a:t>
             </a:r>
           </a:p>
-          <a:p>
-            <a:endParaRPr/>
-          </a:p>
+          <a:p/>
           <a:p>
             <a:r>
               <a:t>#NONUMBERING# マーカーがあるスライドでは、タイトルに章・節番号を付与しません</a:t>
             </a:r>
           </a:p>
-          <a:p>
-            <a:endParaRPr/>
-          </a:p>
+          <a:p/>
           <a:p>
             <a:r>
               <a:t>#STAY# マーカーがあるスライドでは、　章・節番号のカウントを行いません</a:t>
             </a:r>
           </a:p>
-          <a:p>
-            <a:endParaRPr/>
-          </a:p>
+          <a:p/>
           <a:p>
             <a:r>
               <a:t>#NOREPLACE# マーカーがあるスライドでは、文字列置換を行いません </a:t>
@@ -2015,58 +1710,27 @@
               <a:t>（#CHAPT#, #SECTION#、その他のマーカーがすべて残ります）</a:t>
             </a:r>
           </a:p>
-          <a:p>
-            <a:endParaRPr/>
-          </a:p>
-          <a:p>
-            <a:endParaRPr/>
-          </a:p>
-          <a:p>
-            <a:r>
-              <a:t>```{=latex}</a:t>
-            </a:r>
-          </a:p>
-          <a:p>
-            <a:r>
-              <a:t>\begin{center}</a:t>
-            </a:r>
-          </a:p>
-          <a:p>
-            <a:r>
-              <a:t>```</a:t>
-            </a:r>
-          </a:p>
-          <a:p>
-            <a:endParaRPr/>
-          </a:p>
-          <a:p>
-            <a:r>
-              <a:rPr lang="en-US"/>
+          <a:p/>
+          <a:p/>
+          <a:p>
+            <a:r>
+              <a:t>::: {.center}</a:t>
+            </a:r>
+          </a:p>
+          <a:p/>
+          <a:p>
+            <a:r>
               <a:t>![](figures/&lt;__BASEFILENAME__&gt;_slide&lt;__SLIDENUM__&gt;_fig.png){ width=95% }</a:t>
             </a:r>
           </a:p>
-          <a:p>
-            <a:endParaRPr/>
-          </a:p>
-          <a:p>
-            <a:r>
-              <a:t>```{=latex}</a:t>
-            </a:r>
-          </a:p>
-          <a:p>
-            <a:r>
-              <a:t>\end{center}</a:t>
-            </a:r>
-          </a:p>
-          <a:p>
-            <a:r>
-              <a:t>```</a:t>
-            </a:r>
-            <a:endParaRPr lang="en-US"/>
-          </a:p>
-          <a:p>
-            <a:endParaRPr/>
-          </a:p>
+          <a:p/>
+          <a:p>
+            <a:r>
+              <a:t>:::</a:t>
+            </a:r>
+          </a:p>
+          <a:p/>
+          <a:p/>
         </p:txBody>
       </p:sp>
       <p:sp>
